--- a/assets/powerpoints/module-urgence/A2-le-son-u-et-le-son-ou.pptx
+++ b/assets/powerpoints/module-urgence/A2-le-son-u-et-le-son-ou.pptx
@@ -4574,7 +4574,7 @@
             <a:r>
               <a:rPr sz="1300" b="1" i="0" spc="156">
                 <a:solidFill>
-                  <a:srgbClr val="6B4FBB"/>
+                  <a:srgbClr val="3B49A0"/>
                 </a:solidFill>
                 <a:latin typeface="Verdana"/>
               </a:rPr>
@@ -4914,7 +4914,7 @@
             <a:r>
               <a:rPr sz="1300" b="1" i="0" spc="156">
                 <a:solidFill>
-                  <a:srgbClr val="6B4FBB"/>
+                  <a:srgbClr val="3B49A0"/>
                 </a:solidFill>
                 <a:latin typeface="Verdana"/>
               </a:rPr>
@@ -4940,7 +4940,7 @@
             </a:avLst>
           </a:prstGeom>
           <a:solidFill>
-            <a:srgbClr val="EFEAFA"/>
+            <a:srgbClr val="E8EAFA"/>
           </a:solidFill>
           <a:ln w="12700">
             <a:solidFill>
@@ -5261,7 +5261,7 @@
             <a:r>
               <a:rPr sz="1300" b="1" i="0" spc="156">
                 <a:solidFill>
-                  <a:srgbClr val="6B4FBB"/>
+                  <a:srgbClr val="3B49A0"/>
                 </a:solidFill>
                 <a:latin typeface="Verdana"/>
               </a:rPr>
@@ -5411,7 +5411,7 @@
             </a:avLst>
           </a:prstGeom>
           <a:solidFill>
-            <a:srgbClr val="EFEAFA"/>
+            <a:srgbClr val="E8EAFA"/>
           </a:solidFill>
           <a:ln>
             <a:noFill/>
@@ -5468,7 +5468,7 @@
             <a:r>
               <a:rPr sz="1500" b="1" i="0">
                 <a:solidFill>
-                  <a:srgbClr val="6B4FBB"/>
+                  <a:srgbClr val="3B49A0"/>
                 </a:solidFill>
                 <a:latin typeface="Verdana"/>
               </a:rPr>
@@ -5579,7 +5579,7 @@
             </a:avLst>
           </a:prstGeom>
           <a:solidFill>
-            <a:srgbClr val="EFEAFA"/>
+            <a:srgbClr val="E8EAFA"/>
           </a:solidFill>
           <a:ln>
             <a:noFill/>
@@ -5636,7 +5636,7 @@
             <a:r>
               <a:rPr sz="1500" b="1" i="0">
                 <a:solidFill>
-                  <a:srgbClr val="6B4FBB"/>
+                  <a:srgbClr val="3B49A0"/>
                 </a:solidFill>
                 <a:latin typeface="Verdana"/>
               </a:rPr>
@@ -5747,7 +5747,7 @@
             </a:avLst>
           </a:prstGeom>
           <a:solidFill>
-            <a:srgbClr val="EFEAFA"/>
+            <a:srgbClr val="E8EAFA"/>
           </a:solidFill>
           <a:ln>
             <a:noFill/>
@@ -5804,7 +5804,7 @@
             <a:r>
               <a:rPr sz="1500" b="1" i="0">
                 <a:solidFill>
-                  <a:srgbClr val="6B4FBB"/>
+                  <a:srgbClr val="3B49A0"/>
                 </a:solidFill>
                 <a:latin typeface="Verdana"/>
               </a:rPr>
@@ -5915,7 +5915,7 @@
             </a:avLst>
           </a:prstGeom>
           <a:solidFill>
-            <a:srgbClr val="EFEAFA"/>
+            <a:srgbClr val="E8EAFA"/>
           </a:solidFill>
           <a:ln>
             <a:noFill/>
@@ -5972,7 +5972,7 @@
             <a:r>
               <a:rPr sz="1500" b="1" i="0">
                 <a:solidFill>
-                  <a:srgbClr val="6B4FBB"/>
+                  <a:srgbClr val="3B49A0"/>
                 </a:solidFill>
                 <a:latin typeface="Verdana"/>
               </a:rPr>
@@ -6083,7 +6083,7 @@
             </a:avLst>
           </a:prstGeom>
           <a:solidFill>
-            <a:srgbClr val="EFEAFA"/>
+            <a:srgbClr val="E8EAFA"/>
           </a:solidFill>
           <a:ln>
             <a:noFill/>
@@ -6140,7 +6140,7 @@
             <a:r>
               <a:rPr sz="1500" b="1" i="0">
                 <a:solidFill>
-                  <a:srgbClr val="6B4FBB"/>
+                  <a:srgbClr val="3B49A0"/>
                 </a:solidFill>
                 <a:latin typeface="Verdana"/>
               </a:rPr>
@@ -6251,7 +6251,7 @@
             </a:avLst>
           </a:prstGeom>
           <a:solidFill>
-            <a:srgbClr val="EFEAFA"/>
+            <a:srgbClr val="E8EAFA"/>
           </a:solidFill>
           <a:ln>
             <a:noFill/>
@@ -6308,7 +6308,7 @@
             <a:r>
               <a:rPr sz="1500" b="1" i="0">
                 <a:solidFill>
-                  <a:srgbClr val="6B4FBB"/>
+                  <a:srgbClr val="3B49A0"/>
                 </a:solidFill>
                 <a:latin typeface="Verdana"/>
               </a:rPr>
@@ -6524,7 +6524,7 @@
             <a:r>
               <a:rPr sz="1300" b="1" i="0" spc="156">
                 <a:solidFill>
-                  <a:srgbClr val="6B4FBB"/>
+                  <a:srgbClr val="3B49A0"/>
                 </a:solidFill>
                 <a:latin typeface="Verdana"/>
               </a:rPr>
@@ -6674,7 +6674,7 @@
             </a:avLst>
           </a:prstGeom>
           <a:solidFill>
-            <a:srgbClr val="EFEAFA"/>
+            <a:srgbClr val="E8EAFA"/>
           </a:solidFill>
           <a:ln>
             <a:noFill/>
@@ -6731,7 +6731,7 @@
             <a:r>
               <a:rPr sz="1500" b="1" i="0">
                 <a:solidFill>
-                  <a:srgbClr val="6B4FBB"/>
+                  <a:srgbClr val="3B49A0"/>
                 </a:solidFill>
                 <a:latin typeface="Verdana"/>
               </a:rPr>
@@ -6851,7 +6851,7 @@
             </a:avLst>
           </a:prstGeom>
           <a:solidFill>
-            <a:srgbClr val="EFEAFA"/>
+            <a:srgbClr val="E8EAFA"/>
           </a:solidFill>
           <a:ln>
             <a:noFill/>
@@ -6908,7 +6908,7 @@
             <a:r>
               <a:rPr sz="1500" b="1" i="0">
                 <a:solidFill>
-                  <a:srgbClr val="6B4FBB"/>
+                  <a:srgbClr val="3B49A0"/>
                 </a:solidFill>
                 <a:latin typeface="Verdana"/>
               </a:rPr>
@@ -7028,7 +7028,7 @@
             </a:avLst>
           </a:prstGeom>
           <a:solidFill>
-            <a:srgbClr val="EFEAFA"/>
+            <a:srgbClr val="E8EAFA"/>
           </a:solidFill>
           <a:ln>
             <a:noFill/>
@@ -7085,7 +7085,7 @@
             <a:r>
               <a:rPr sz="1500" b="1" i="0">
                 <a:solidFill>
-                  <a:srgbClr val="6B4FBB"/>
+                  <a:srgbClr val="3B49A0"/>
                 </a:solidFill>
                 <a:latin typeface="Verdana"/>
               </a:rPr>
@@ -7205,7 +7205,7 @@
             </a:avLst>
           </a:prstGeom>
           <a:solidFill>
-            <a:srgbClr val="EFEAFA"/>
+            <a:srgbClr val="E8EAFA"/>
           </a:solidFill>
           <a:ln>
             <a:noFill/>
@@ -7262,7 +7262,7 @@
             <a:r>
               <a:rPr sz="1500" b="1" i="0">
                 <a:solidFill>
-                  <a:srgbClr val="6B4FBB"/>
+                  <a:srgbClr val="3B49A0"/>
                 </a:solidFill>
                 <a:latin typeface="Verdana"/>
               </a:rPr>
@@ -7382,7 +7382,7 @@
             </a:avLst>
           </a:prstGeom>
           <a:solidFill>
-            <a:srgbClr val="EFEAFA"/>
+            <a:srgbClr val="E8EAFA"/>
           </a:solidFill>
           <a:ln>
             <a:noFill/>
@@ -7439,7 +7439,7 @@
             <a:r>
               <a:rPr sz="1500" b="1" i="0">
                 <a:solidFill>
-                  <a:srgbClr val="6B4FBB"/>
+                  <a:srgbClr val="3B49A0"/>
                 </a:solidFill>
                 <a:latin typeface="Verdana"/>
               </a:rPr>
@@ -7559,7 +7559,7 @@
             </a:avLst>
           </a:prstGeom>
           <a:solidFill>
-            <a:srgbClr val="EFEAFA"/>
+            <a:srgbClr val="E8EAFA"/>
           </a:solidFill>
           <a:ln>
             <a:noFill/>
@@ -7616,7 +7616,7 @@
             <a:r>
               <a:rPr sz="1500" b="1" i="0">
                 <a:solidFill>
-                  <a:srgbClr val="6B4FBB"/>
+                  <a:srgbClr val="3B49A0"/>
                 </a:solidFill>
                 <a:latin typeface="Verdana"/>
               </a:rPr>
@@ -7841,7 +7841,7 @@
             <a:r>
               <a:rPr sz="1300" b="1" i="0" spc="156">
                 <a:solidFill>
-                  <a:srgbClr val="6B4FBB"/>
+                  <a:srgbClr val="3B49A0"/>
                 </a:solidFill>
                 <a:latin typeface="Verdana"/>
               </a:rPr>
@@ -7991,7 +7991,7 @@
             </a:avLst>
           </a:prstGeom>
           <a:solidFill>
-            <a:srgbClr val="EFEAFA"/>
+            <a:srgbClr val="E8EAFA"/>
           </a:solidFill>
           <a:ln>
             <a:noFill/>
@@ -8048,7 +8048,7 @@
             <a:r>
               <a:rPr sz="1500" b="1" i="0">
                 <a:solidFill>
-                  <a:srgbClr val="6B4FBB"/>
+                  <a:srgbClr val="3B49A0"/>
                 </a:solidFill>
                 <a:latin typeface="Verdana"/>
               </a:rPr>
@@ -8159,7 +8159,7 @@
             </a:avLst>
           </a:prstGeom>
           <a:solidFill>
-            <a:srgbClr val="EFEAFA"/>
+            <a:srgbClr val="E8EAFA"/>
           </a:solidFill>
           <a:ln>
             <a:noFill/>
@@ -8216,7 +8216,7 @@
             <a:r>
               <a:rPr sz="1500" b="1" i="0">
                 <a:solidFill>
-                  <a:srgbClr val="6B4FBB"/>
+                  <a:srgbClr val="3B49A0"/>
                 </a:solidFill>
                 <a:latin typeface="Verdana"/>
               </a:rPr>
@@ -8327,7 +8327,7 @@
             </a:avLst>
           </a:prstGeom>
           <a:solidFill>
-            <a:srgbClr val="EFEAFA"/>
+            <a:srgbClr val="E8EAFA"/>
           </a:solidFill>
           <a:ln>
             <a:noFill/>
@@ -8384,7 +8384,7 @@
             <a:r>
               <a:rPr sz="1500" b="1" i="0">
                 <a:solidFill>
-                  <a:srgbClr val="6B4FBB"/>
+                  <a:srgbClr val="3B49A0"/>
                 </a:solidFill>
                 <a:latin typeface="Verdana"/>
               </a:rPr>
@@ -8600,7 +8600,7 @@
             <a:r>
               <a:rPr sz="1300" b="1" i="0" spc="156">
                 <a:solidFill>
-                  <a:srgbClr val="6B4FBB"/>
+                  <a:srgbClr val="3B49A0"/>
                 </a:solidFill>
                 <a:latin typeface="Verdana"/>
               </a:rPr>
@@ -8750,7 +8750,7 @@
             </a:avLst>
           </a:prstGeom>
           <a:solidFill>
-            <a:srgbClr val="EFEAFA"/>
+            <a:srgbClr val="E8EAFA"/>
           </a:solidFill>
           <a:ln>
             <a:noFill/>
@@ -8807,7 +8807,7 @@
             <a:r>
               <a:rPr sz="1500" b="1" i="0">
                 <a:solidFill>
-                  <a:srgbClr val="6B4FBB"/>
+                  <a:srgbClr val="3B49A0"/>
                 </a:solidFill>
                 <a:latin typeface="Verdana"/>
               </a:rPr>
@@ -8927,7 +8927,7 @@
             </a:avLst>
           </a:prstGeom>
           <a:solidFill>
-            <a:srgbClr val="EFEAFA"/>
+            <a:srgbClr val="E8EAFA"/>
           </a:solidFill>
           <a:ln>
             <a:noFill/>
@@ -8984,7 +8984,7 @@
             <a:r>
               <a:rPr sz="1500" b="1" i="0">
                 <a:solidFill>
-                  <a:srgbClr val="6B4FBB"/>
+                  <a:srgbClr val="3B49A0"/>
                 </a:solidFill>
                 <a:latin typeface="Verdana"/>
               </a:rPr>
@@ -9104,7 +9104,7 @@
             </a:avLst>
           </a:prstGeom>
           <a:solidFill>
-            <a:srgbClr val="EFEAFA"/>
+            <a:srgbClr val="E8EAFA"/>
           </a:solidFill>
           <a:ln>
             <a:noFill/>
@@ -9161,7 +9161,7 @@
             <a:r>
               <a:rPr sz="1500" b="1" i="0">
                 <a:solidFill>
-                  <a:srgbClr val="6B4FBB"/>
+                  <a:srgbClr val="3B49A0"/>
                 </a:solidFill>
                 <a:latin typeface="Verdana"/>
               </a:rPr>
@@ -9849,7 +9849,7 @@
             <a:r>
               <a:rPr sz="1300" b="1" i="0" spc="156">
                 <a:solidFill>
-                  <a:srgbClr val="6B4FBB"/>
+                  <a:srgbClr val="3B49A0"/>
                 </a:solidFill>
                 <a:latin typeface="Verdana"/>
               </a:rPr>
@@ -9960,7 +9960,7 @@
             </a:avLst>
           </a:prstGeom>
           <a:solidFill>
-            <a:srgbClr val="EFEAFA"/>
+            <a:srgbClr val="E8EAFA"/>
           </a:solidFill>
           <a:ln>
             <a:noFill/>
@@ -10017,7 +10017,7 @@
             <a:r>
               <a:rPr sz="1500" b="1" i="0">
                 <a:solidFill>
-                  <a:srgbClr val="6B4FBB"/>
+                  <a:srgbClr val="3B49A0"/>
                 </a:solidFill>
                 <a:latin typeface="Verdana"/>
               </a:rPr>
@@ -10128,7 +10128,7 @@
             </a:avLst>
           </a:prstGeom>
           <a:solidFill>
-            <a:srgbClr val="EFEAFA"/>
+            <a:srgbClr val="E8EAFA"/>
           </a:solidFill>
           <a:ln>
             <a:noFill/>
@@ -10185,7 +10185,7 @@
             <a:r>
               <a:rPr sz="1500" b="1" i="0">
                 <a:solidFill>
-                  <a:srgbClr val="6B4FBB"/>
+                  <a:srgbClr val="3B49A0"/>
                 </a:solidFill>
                 <a:latin typeface="Verdana"/>
               </a:rPr>
@@ -10296,7 +10296,7 @@
             </a:avLst>
           </a:prstGeom>
           <a:solidFill>
-            <a:srgbClr val="EFEAFA"/>
+            <a:srgbClr val="E8EAFA"/>
           </a:solidFill>
           <a:ln>
             <a:noFill/>
@@ -10353,7 +10353,7 @@
             <a:r>
               <a:rPr sz="1500" b="1" i="0">
                 <a:solidFill>
-                  <a:srgbClr val="6B4FBB"/>
+                  <a:srgbClr val="3B49A0"/>
                 </a:solidFill>
                 <a:latin typeface="Verdana"/>
               </a:rPr>
@@ -10464,7 +10464,7 @@
             </a:avLst>
           </a:prstGeom>
           <a:solidFill>
-            <a:srgbClr val="EFEAFA"/>
+            <a:srgbClr val="E8EAFA"/>
           </a:solidFill>
           <a:ln>
             <a:noFill/>
@@ -10521,7 +10521,7 @@
             <a:r>
               <a:rPr sz="1500" b="1" i="0">
                 <a:solidFill>
-                  <a:srgbClr val="6B4FBB"/>
+                  <a:srgbClr val="3B49A0"/>
                 </a:solidFill>
                 <a:latin typeface="Verdana"/>
               </a:rPr>
@@ -10737,7 +10737,7 @@
             <a:r>
               <a:rPr sz="1300" b="1" i="0" spc="156">
                 <a:solidFill>
-                  <a:srgbClr val="6B4FBB"/>
+                  <a:srgbClr val="3B49A0"/>
                 </a:solidFill>
                 <a:latin typeface="Verdana"/>
               </a:rPr>
@@ -10763,7 +10763,7 @@
             </a:avLst>
           </a:prstGeom>
           <a:solidFill>
-            <a:srgbClr val="EFEAFA"/>
+            <a:srgbClr val="E8EAFA"/>
           </a:solidFill>
           <a:ln w="12700">
             <a:solidFill>
@@ -11084,7 +11084,7 @@
             <a:r>
               <a:rPr sz="1300" b="1" i="0" spc="156">
                 <a:solidFill>
-                  <a:srgbClr val="6B4FBB"/>
+                  <a:srgbClr val="3B49A0"/>
                 </a:solidFill>
                 <a:latin typeface="Verdana"/>
               </a:rPr>
@@ -11364,7 +11364,7 @@
             <a:r>
               <a:rPr sz="1800" b="1" i="0">
                 <a:solidFill>
-                  <a:srgbClr val="6B4FBB"/>
+                  <a:srgbClr val="3B49A0"/>
                 </a:solidFill>
                 <a:latin typeface="Verdana"/>
               </a:rPr>
@@ -11562,7 +11562,7 @@
             <a:r>
               <a:rPr sz="1800" b="1" i="0">
                 <a:solidFill>
-                  <a:srgbClr val="6B4FBB"/>
+                  <a:srgbClr val="3B49A0"/>
                 </a:solidFill>
                 <a:latin typeface="Verdana"/>
               </a:rPr>
@@ -11941,7 +11941,7 @@
             <a:r>
               <a:rPr sz="1300" b="1" i="0" spc="156">
                 <a:solidFill>
-                  <a:srgbClr val="6B4FBB"/>
+                  <a:srgbClr val="3B49A0"/>
                 </a:solidFill>
                 <a:latin typeface="Verdana"/>
               </a:rPr>
@@ -12065,7 +12065,7 @@
             <a:r>
               <a:rPr sz="2100" b="1" i="0">
                 <a:solidFill>
-                  <a:srgbClr val="6B4FBB"/>
+                  <a:srgbClr val="3B49A0"/>
                 </a:solidFill>
                 <a:latin typeface="Verdana"/>
               </a:rPr>
@@ -12189,7 +12189,7 @@
             <a:r>
               <a:rPr sz="2100" b="1" i="0">
                 <a:solidFill>
-                  <a:srgbClr val="6B4FBB"/>
+                  <a:srgbClr val="3B49A0"/>
                 </a:solidFill>
                 <a:latin typeface="Verdana"/>
               </a:rPr>
@@ -12313,7 +12313,7 @@
             <a:r>
               <a:rPr sz="2100" b="1" i="0">
                 <a:solidFill>
-                  <a:srgbClr val="6B4FBB"/>
+                  <a:srgbClr val="3B49A0"/>
                 </a:solidFill>
                 <a:latin typeface="Verdana"/>
               </a:rPr>
@@ -12437,7 +12437,7 @@
             <a:r>
               <a:rPr sz="2100" b="1" i="0">
                 <a:solidFill>
-                  <a:srgbClr val="6B4FBB"/>
+                  <a:srgbClr val="3B49A0"/>
                 </a:solidFill>
                 <a:latin typeface="Verdana"/>
               </a:rPr>
@@ -12653,7 +12653,7 @@
             <a:r>
               <a:rPr sz="1300" b="1" i="0" spc="156">
                 <a:solidFill>
-                  <a:srgbClr val="6B4FBB"/>
+                  <a:srgbClr val="3B49A0"/>
                 </a:solidFill>
                 <a:latin typeface="Verdana"/>
               </a:rPr>
@@ -12803,7 +12803,7 @@
             </a:avLst>
           </a:prstGeom>
           <a:solidFill>
-            <a:srgbClr val="EFEAFA"/>
+            <a:srgbClr val="E8EAFA"/>
           </a:solidFill>
           <a:ln>
             <a:noFill/>
@@ -12860,7 +12860,7 @@
             <a:r>
               <a:rPr sz="1500" b="1" i="0">
                 <a:solidFill>
-                  <a:srgbClr val="6B4FBB"/>
+                  <a:srgbClr val="3B49A0"/>
                 </a:solidFill>
                 <a:latin typeface="Verdana"/>
               </a:rPr>
@@ -12971,7 +12971,7 @@
             </a:avLst>
           </a:prstGeom>
           <a:solidFill>
-            <a:srgbClr val="EFEAFA"/>
+            <a:srgbClr val="E8EAFA"/>
           </a:solidFill>
           <a:ln>
             <a:noFill/>
@@ -13028,7 +13028,7 @@
             <a:r>
               <a:rPr sz="1500" b="1" i="0">
                 <a:solidFill>
-                  <a:srgbClr val="6B4FBB"/>
+                  <a:srgbClr val="3B49A0"/>
                 </a:solidFill>
                 <a:latin typeface="Verdana"/>
               </a:rPr>
@@ -13139,7 +13139,7 @@
             </a:avLst>
           </a:prstGeom>
           <a:solidFill>
-            <a:srgbClr val="EFEAFA"/>
+            <a:srgbClr val="E8EAFA"/>
           </a:solidFill>
           <a:ln>
             <a:noFill/>
@@ -13196,7 +13196,7 @@
             <a:r>
               <a:rPr sz="1500" b="1" i="0">
                 <a:solidFill>
-                  <a:srgbClr val="6B4FBB"/>
+                  <a:srgbClr val="3B49A0"/>
                 </a:solidFill>
                 <a:latin typeface="Verdana"/>
               </a:rPr>
@@ -13307,7 +13307,7 @@
             </a:avLst>
           </a:prstGeom>
           <a:solidFill>
-            <a:srgbClr val="EFEAFA"/>
+            <a:srgbClr val="E8EAFA"/>
           </a:solidFill>
           <a:ln>
             <a:noFill/>
@@ -13364,7 +13364,7 @@
             <a:r>
               <a:rPr sz="1500" b="1" i="0">
                 <a:solidFill>
-                  <a:srgbClr val="6B4FBB"/>
+                  <a:srgbClr val="3B49A0"/>
                 </a:solidFill>
                 <a:latin typeface="Verdana"/>
               </a:rPr>
@@ -13475,7 +13475,7 @@
             </a:avLst>
           </a:prstGeom>
           <a:solidFill>
-            <a:srgbClr val="EFEAFA"/>
+            <a:srgbClr val="E8EAFA"/>
           </a:solidFill>
           <a:ln>
             <a:noFill/>
@@ -13532,7 +13532,7 @@
             <a:r>
               <a:rPr sz="1500" b="1" i="0">
                 <a:solidFill>
-                  <a:srgbClr val="6B4FBB"/>
+                  <a:srgbClr val="3B49A0"/>
                 </a:solidFill>
                 <a:latin typeface="Verdana"/>
               </a:rPr>
@@ -13643,7 +13643,7 @@
             </a:avLst>
           </a:prstGeom>
           <a:solidFill>
-            <a:srgbClr val="EFEAFA"/>
+            <a:srgbClr val="E8EAFA"/>
           </a:solidFill>
           <a:ln>
             <a:noFill/>
@@ -13700,7 +13700,7 @@
             <a:r>
               <a:rPr sz="1500" b="1" i="0">
                 <a:solidFill>
-                  <a:srgbClr val="6B4FBB"/>
+                  <a:srgbClr val="3B49A0"/>
                 </a:solidFill>
                 <a:latin typeface="Verdana"/>
               </a:rPr>
@@ -13811,7 +13811,7 @@
             </a:avLst>
           </a:prstGeom>
           <a:solidFill>
-            <a:srgbClr val="EFEAFA"/>
+            <a:srgbClr val="E8EAFA"/>
           </a:solidFill>
           <a:ln>
             <a:noFill/>
@@ -13868,7 +13868,7 @@
             <a:r>
               <a:rPr sz="1500" b="1" i="0">
                 <a:solidFill>
-                  <a:srgbClr val="6B4FBB"/>
+                  <a:srgbClr val="3B49A0"/>
                 </a:solidFill>
                 <a:latin typeface="Verdana"/>
               </a:rPr>
@@ -13979,7 +13979,7 @@
             </a:avLst>
           </a:prstGeom>
           <a:solidFill>
-            <a:srgbClr val="EFEAFA"/>
+            <a:srgbClr val="E8EAFA"/>
           </a:solidFill>
           <a:ln>
             <a:noFill/>
@@ -14036,7 +14036,7 @@
             <a:r>
               <a:rPr sz="1500" b="1" i="0">
                 <a:solidFill>
-                  <a:srgbClr val="6B4FBB"/>
+                  <a:srgbClr val="3B49A0"/>
                 </a:solidFill>
                 <a:latin typeface="Verdana"/>
               </a:rPr>
@@ -14252,7 +14252,7 @@
             <a:r>
               <a:rPr sz="1300" b="1" i="0" spc="156">
                 <a:solidFill>
-                  <a:srgbClr val="6B4FBB"/>
+                  <a:srgbClr val="3B49A0"/>
                 </a:solidFill>
                 <a:latin typeface="Verdana"/>
               </a:rPr>
@@ -14402,7 +14402,7 @@
             </a:avLst>
           </a:prstGeom>
           <a:solidFill>
-            <a:srgbClr val="EFEAFA"/>
+            <a:srgbClr val="E8EAFA"/>
           </a:solidFill>
           <a:ln>
             <a:noFill/>
@@ -14459,7 +14459,7 @@
             <a:r>
               <a:rPr sz="1500" b="1" i="0">
                 <a:solidFill>
-                  <a:srgbClr val="6B4FBB"/>
+                  <a:srgbClr val="3B49A0"/>
                 </a:solidFill>
                 <a:latin typeface="Verdana"/>
               </a:rPr>
@@ -14579,7 +14579,7 @@
             </a:avLst>
           </a:prstGeom>
           <a:solidFill>
-            <a:srgbClr val="EFEAFA"/>
+            <a:srgbClr val="E8EAFA"/>
           </a:solidFill>
           <a:ln>
             <a:noFill/>
@@ -14636,7 +14636,7 @@
             <a:r>
               <a:rPr sz="1500" b="1" i="0">
                 <a:solidFill>
-                  <a:srgbClr val="6B4FBB"/>
+                  <a:srgbClr val="3B49A0"/>
                 </a:solidFill>
                 <a:latin typeface="Verdana"/>
               </a:rPr>
@@ -14756,7 +14756,7 @@
             </a:avLst>
           </a:prstGeom>
           <a:solidFill>
-            <a:srgbClr val="EFEAFA"/>
+            <a:srgbClr val="E8EAFA"/>
           </a:solidFill>
           <a:ln>
             <a:noFill/>
@@ -14813,7 +14813,7 @@
             <a:r>
               <a:rPr sz="1500" b="1" i="0">
                 <a:solidFill>
-                  <a:srgbClr val="6B4FBB"/>
+                  <a:srgbClr val="3B49A0"/>
                 </a:solidFill>
                 <a:latin typeface="Verdana"/>
               </a:rPr>
@@ -14933,7 +14933,7 @@
             </a:avLst>
           </a:prstGeom>
           <a:solidFill>
-            <a:srgbClr val="EFEAFA"/>
+            <a:srgbClr val="E8EAFA"/>
           </a:solidFill>
           <a:ln>
             <a:noFill/>
@@ -14990,7 +14990,7 @@
             <a:r>
               <a:rPr sz="1500" b="1" i="0">
                 <a:solidFill>
-                  <a:srgbClr val="6B4FBB"/>
+                  <a:srgbClr val="3B49A0"/>
                 </a:solidFill>
                 <a:latin typeface="Verdana"/>
               </a:rPr>
@@ -15110,7 +15110,7 @@
             </a:avLst>
           </a:prstGeom>
           <a:solidFill>
-            <a:srgbClr val="EFEAFA"/>
+            <a:srgbClr val="E8EAFA"/>
           </a:solidFill>
           <a:ln>
             <a:noFill/>
@@ -15167,7 +15167,7 @@
             <a:r>
               <a:rPr sz="1500" b="1" i="0">
                 <a:solidFill>
-                  <a:srgbClr val="6B4FBB"/>
+                  <a:srgbClr val="3B49A0"/>
                 </a:solidFill>
                 <a:latin typeface="Verdana"/>
               </a:rPr>
@@ -15287,7 +15287,7 @@
             </a:avLst>
           </a:prstGeom>
           <a:solidFill>
-            <a:srgbClr val="EFEAFA"/>
+            <a:srgbClr val="E8EAFA"/>
           </a:solidFill>
           <a:ln>
             <a:noFill/>
@@ -15344,7 +15344,7 @@
             <a:r>
               <a:rPr sz="1500" b="1" i="0">
                 <a:solidFill>
-                  <a:srgbClr val="6B4FBB"/>
+                  <a:srgbClr val="3B49A0"/>
                 </a:solidFill>
                 <a:latin typeface="Verdana"/>
               </a:rPr>
@@ -15464,7 +15464,7 @@
             </a:avLst>
           </a:prstGeom>
           <a:solidFill>
-            <a:srgbClr val="EFEAFA"/>
+            <a:srgbClr val="E8EAFA"/>
           </a:solidFill>
           <a:ln>
             <a:noFill/>
@@ -15521,7 +15521,7 @@
             <a:r>
               <a:rPr sz="1500" b="1" i="0">
                 <a:solidFill>
-                  <a:srgbClr val="6B4FBB"/>
+                  <a:srgbClr val="3B49A0"/>
                 </a:solidFill>
                 <a:latin typeface="Verdana"/>
               </a:rPr>
@@ -15641,7 +15641,7 @@
             </a:avLst>
           </a:prstGeom>
           <a:solidFill>
-            <a:srgbClr val="EFEAFA"/>
+            <a:srgbClr val="E8EAFA"/>
           </a:solidFill>
           <a:ln>
             <a:noFill/>
@@ -15698,7 +15698,7 @@
             <a:r>
               <a:rPr sz="1500" b="1" i="0">
                 <a:solidFill>
-                  <a:srgbClr val="6B4FBB"/>
+                  <a:srgbClr val="3B49A0"/>
                 </a:solidFill>
                 <a:latin typeface="Verdana"/>
               </a:rPr>
@@ -15923,7 +15923,7 @@
             <a:r>
               <a:rPr sz="1300" b="1" i="0" spc="156">
                 <a:solidFill>
-                  <a:srgbClr val="6B4FBB"/>
+                  <a:srgbClr val="3B49A0"/>
                 </a:solidFill>
                 <a:latin typeface="Verdana"/>
               </a:rPr>
@@ -16242,7 +16242,7 @@
             <a:r>
               <a:rPr sz="1800" b="1" i="0">
                 <a:solidFill>
-                  <a:srgbClr val="6B4FBB"/>
+                  <a:srgbClr val="3B49A0"/>
                 </a:solidFill>
                 <a:latin typeface="Verdana"/>
               </a:rPr>
@@ -16401,7 +16401,7 @@
             <a:r>
               <a:rPr sz="1800" b="1" i="0">
                 <a:solidFill>
-                  <a:srgbClr val="6B4FBB"/>
+                  <a:srgbClr val="3B49A0"/>
                 </a:solidFill>
                 <a:latin typeface="Verdana"/>
               </a:rPr>
@@ -16560,7 +16560,7 @@
             <a:r>
               <a:rPr sz="1800" b="1" i="0">
                 <a:solidFill>
-                  <a:srgbClr val="6B4FBB"/>
+                  <a:srgbClr val="3B49A0"/>
                 </a:solidFill>
                 <a:latin typeface="Verdana"/>
               </a:rPr>
@@ -16719,7 +16719,7 @@
             <a:r>
               <a:rPr sz="1800" b="1" i="0">
                 <a:solidFill>
-                  <a:srgbClr val="6B4FBB"/>
+                  <a:srgbClr val="3B49A0"/>
                 </a:solidFill>
                 <a:latin typeface="Verdana"/>
               </a:rPr>
@@ -16896,7 +16896,7 @@
             <a:r>
               <a:rPr sz="1300" b="1" i="0" spc="156">
                 <a:solidFill>
-                  <a:srgbClr val="6B4FBB"/>
+                  <a:srgbClr val="3B49A0"/>
                 </a:solidFill>
                 <a:latin typeface="Verdana"/>
               </a:rPr>
